--- a/docs/答辩PPT-恶意攻击行为溯源分析系统-深色版.pptx
+++ b/docs/答辩PPT-恶意攻击行为溯源分析系统-深色版.pptx
@@ -9355,7 +9355,7 @@
                 </a:solidFill>
                 <a:latin typeface="Microsoft YaHei"/>
               </a:rPr>
-              <a:t>▸ 主机侧行为深挖：内存注入 / 反射加载检测</a:t>
+              <a:t>内存镜像取证：YARA 扫描</a:t>
             </a:r>
           </a:p>
         </p:txBody>
@@ -12011,7 +12011,7 @@
                 </a:solidFill>
                 <a:latin typeface="Microsoft YaHei"/>
               </a:rPr>
-              <a:t>31 种事件类型</a:t>
+              <a:t>33 种事件类型</a:t>
             </a:r>
           </a:p>
           <a:p>
@@ -13921,7 +13921,7 @@
                 </a:solidFill>
                 <a:latin typeface="Microsoft YaHei"/>
               </a:rPr>
-              <a:t>主机侧 31 种事件类型 · 网络侧 10 检测器 → ATT&amp;CK</a:t>
+              <a:t>主机侧 33 种事件类型 · 网络侧 10 检测器 → ATT&amp;CK</a:t>
             </a:r>
           </a:p>
         </p:txBody>
@@ -14167,7 +14167,7 @@
                 </a:solidFill>
                 <a:latin typeface="Microsoft YaHei"/>
               </a:rPr>
-              <a:t>✓ 31 种标准事件类型（登录 3 / 进程 2 / 网络 3 / 文件 5 / 注册表 4 / 账户 6 / 服务 4 / 计划任务 3 / 日志清除）</a:t>
+              <a:t>✓ 33 种标准事件类型（登录 3 / 进程 4 / 网络 3 / 文件 5 / 注册表 4 / 账户 6 / 服务 4 / 计划任务 3 / 日志清除）</a:t>
             </a:r>
           </a:p>
         </p:txBody>
@@ -14284,7 +14284,7 @@
                 </a:solidFill>
                 <a:latin typeface="Microsoft YaHei"/>
               </a:rPr>
-              <a:t>✓ 异常预标记 9 条规则：爆破 / 用户名枚举 / 编码执行 / 远程下载 / 注册表持久化…</a:t>
+              <a:t>✓ 异常预标记 8 条规则：爆破 / 用户名枚举 / 编码执行 / 远程下载 / 内存注入检测…</a:t>
             </a:r>
           </a:p>
         </p:txBody>
